--- a/sales-kit/TrillionBank_Company_Profile.pptx
+++ b/sales-kit/TrillionBank_Company_Profile.pptx
@@ -3106,7 +3106,7 @@
     <p:bg>
       <p:bgPr>
         <a:solidFill>
-          <a:srgbClr val="0B1B33"/>
+          <a:srgbClr val="FFFFFF"/>
         </a:solidFill>
         <a:effectLst/>
       </p:bgPr>
@@ -3127,51 +3127,7 @@
         <p:spPr>
           <a:xfrm>
             <a:off x="0" y="0"/>
-            <a:ext cx="12191695" cy="6858000"/>
-          </a:xfrm>
-          <a:prstGeom prst="rect">
-            <a:avLst/>
-          </a:prstGeom>
-          <a:solidFill>
-            <a:srgbClr val="0B1B33"/>
-          </a:solidFill>
-          <a:ln>
-            <a:noFill/>
-          </a:ln>
-          <a:effectLst/>
-        </p:spPr>
-        <p:style>
-          <a:lnRef idx="1">
-            <a:schemeClr val="accent1"/>
-          </a:lnRef>
-          <a:fillRef idx="3">
-            <a:schemeClr val="accent1"/>
-          </a:fillRef>
-          <a:effectRef idx="2">
-            <a:schemeClr val="accent1"/>
-          </a:effectRef>
-          <a:fontRef idx="minor">
-            <a:schemeClr val="lt1"/>
-          </a:fontRef>
-        </p:style>
-        <p:txBody>
-          <a:bodyPr rtlCol="0" anchor="ctr"/>
-          <a:lstStyle/>
-          <a:p>
-            <a:pPr algn="ctr"/>
-          </a:p>
-        </p:txBody>
-      </p:sp>
-      <p:sp>
-        <p:nvSpPr>
-          <p:cNvPr id="3" name="Rectangle 2"/>
-          <p:cNvSpPr/>
-          <p:nvPr/>
-        </p:nvSpPr>
-        <p:spPr>
-          <a:xfrm>
-            <a:off x="0" y="6309360"/>
-            <a:ext cx="12191695" cy="548640"/>
+            <a:ext cx="12191695" cy="128016"/>
           </a:xfrm>
           <a:prstGeom prst="rect">
             <a:avLst/>
@@ -3206,9 +3162,53 @@
           </a:p>
         </p:txBody>
       </p:sp>
+      <p:sp>
+        <p:nvSpPr>
+          <p:cNvPr id="3" name="Rectangle 2"/>
+          <p:cNvSpPr/>
+          <p:nvPr/>
+        </p:nvSpPr>
+        <p:spPr>
+          <a:xfrm>
+            <a:off x="0" y="128016"/>
+            <a:ext cx="4206240" cy="54864"/>
+          </a:xfrm>
+          <a:prstGeom prst="rect">
+            <a:avLst/>
+          </a:prstGeom>
+          <a:solidFill>
+            <a:srgbClr val="C5A059"/>
+          </a:solidFill>
+          <a:ln>
+            <a:noFill/>
+          </a:ln>
+          <a:effectLst/>
+        </p:spPr>
+        <p:style>
+          <a:lnRef idx="1">
+            <a:schemeClr val="accent1"/>
+          </a:lnRef>
+          <a:fillRef idx="3">
+            <a:schemeClr val="accent1"/>
+          </a:fillRef>
+          <a:effectRef idx="2">
+            <a:schemeClr val="accent1"/>
+          </a:effectRef>
+          <a:fontRef idx="minor">
+            <a:schemeClr val="lt1"/>
+          </a:fontRef>
+        </p:style>
+        <p:txBody>
+          <a:bodyPr rtlCol="0" anchor="ctr"/>
+          <a:lstStyle/>
+          <a:p>
+            <a:pPr algn="ctr"/>
+          </a:p>
+        </p:txBody>
+      </p:sp>
       <p:pic>
         <p:nvPicPr>
-          <p:cNvPr id="4" name="Picture 3" descr="logo_horizontal_light.png"/>
+          <p:cNvPr id="4" name="Picture 3" descr="logo_horizontal_dark.png"/>
           <p:cNvPicPr>
             <a:picLocks noChangeAspect="1"/>
           </p:cNvPicPr>
@@ -3222,7 +3222,7 @@
         </p:blipFill>
         <p:spPr>
           <a:xfrm>
-            <a:off x="822960" y="685800"/>
+            <a:off x="822960" y="640080"/>
             <a:ext cx="4206240" cy="1186375"/>
           </a:xfrm>
           <a:prstGeom prst="rect">
@@ -3263,7 +3263,7 @@
             <a:r>
               <a:rPr sz="1200" b="1" i="0" spc="300">
                 <a:solidFill>
-                  <a:srgbClr val="C5A059"/>
+                  <a:srgbClr val="2A63C7"/>
                 </a:solidFill>
                 <a:latin typeface="Arial"/>
                 <a:ea typeface="Arial"/>
@@ -3310,7 +3310,7 @@
             <a:r>
               <a:rPr sz="3300" b="1" i="0">
                 <a:solidFill>
-                  <a:srgbClr val="FFFFFF"/>
+                  <a:srgbClr val="14356B"/>
                 </a:solidFill>
                 <a:latin typeface="Yu Gothic UI"/>
                 <a:ea typeface="Yu Gothic UI"/>
@@ -3334,7 +3334,7 @@
             <a:r>
               <a:rPr sz="3300" b="1" i="0">
                 <a:solidFill>
-                  <a:srgbClr val="FFFFFF"/>
+                  <a:srgbClr val="14356B"/>
                 </a:solidFill>
                 <a:latin typeface="Yu Gothic UI"/>
                 <a:ea typeface="Yu Gothic UI"/>
@@ -3356,7 +3356,7 @@
             <a:r>
               <a:rPr sz="3300" b="1" i="0">
                 <a:solidFill>
-                  <a:srgbClr val="FFFFFF"/>
+                  <a:srgbClr val="14356B"/>
                 </a:solidFill>
                 <a:latin typeface="Yu Gothic UI"/>
                 <a:ea typeface="Yu Gothic UI"/>
@@ -3376,7 +3376,7 @@
         <p:spPr>
           <a:xfrm>
             <a:off x="868680" y="4709160"/>
-            <a:ext cx="9875520" cy="914400"/>
+            <a:ext cx="9966960" cy="914400"/>
           </a:xfrm>
           <a:prstGeom prst="rect">
             <a:avLst/>
@@ -3403,7 +3403,7 @@
             <a:r>
               <a:rPr sz="1250" b="0" i="0">
                 <a:solidFill>
-                  <a:srgbClr val="C8D6EC"/>
+                  <a:srgbClr val="5B6472"/>
                 </a:solidFill>
                 <a:latin typeface="Yu Gothic UI"/>
                 <a:ea typeface="Yu Gothic UI"/>
@@ -3427,7 +3427,7 @@
             <a:r>
               <a:rPr sz="1250" b="0" i="0">
                 <a:solidFill>
-                  <a:srgbClr val="C8D6EC"/>
+                  <a:srgbClr val="5B6472"/>
                 </a:solidFill>
                 <a:latin typeface="Yu Gothic UI"/>
                 <a:ea typeface="Yu Gothic UI"/>
@@ -3446,7 +3446,7 @@
         </p:nvSpPr>
         <p:spPr>
           <a:xfrm>
-            <a:off x="868680" y="5623560"/>
+            <a:off x="868680" y="5577840"/>
             <a:ext cx="2331720" cy="457200"/>
           </a:xfrm>
           <a:prstGeom prst="roundRect">
@@ -3455,11 +3455,11 @@
             </a:avLst>
           </a:prstGeom>
           <a:solidFill>
-            <a:srgbClr val="142A47"/>
+            <a:srgbClr val="EEF3FB"/>
           </a:solidFill>
           <a:ln w="12700">
             <a:solidFill>
-              <a:srgbClr val="2E4A74"/>
+              <a:srgbClr val="DDE1E7"/>
             </a:solidFill>
           </a:ln>
           <a:effectLst/>
@@ -3494,7 +3494,7 @@
         </p:nvSpPr>
         <p:spPr>
           <a:xfrm>
-            <a:off x="868680" y="5623560"/>
+            <a:off x="868680" y="5577840"/>
             <a:ext cx="2331720" cy="457200"/>
           </a:xfrm>
           <a:prstGeom prst="rect">
@@ -3530,7 +3530,7 @@
             <a:r>
               <a:rPr sz="1100" b="0" i="0">
                 <a:solidFill>
-                  <a:srgbClr val="FFFFFF"/>
+                  <a:srgbClr val="14356B"/>
                 </a:solidFill>
                 <a:latin typeface="Yu Gothic UI"/>
                 <a:ea typeface="Yu Gothic UI"/>
@@ -3549,7 +3549,7 @@
         </p:nvSpPr>
         <p:spPr>
           <a:xfrm>
-            <a:off x="3383280" y="5623560"/>
+            <a:off x="3383280" y="5577840"/>
             <a:ext cx="2331720" cy="457200"/>
           </a:xfrm>
           <a:prstGeom prst="roundRect">
@@ -3558,11 +3558,11 @@
             </a:avLst>
           </a:prstGeom>
           <a:solidFill>
-            <a:srgbClr val="142A47"/>
+            <a:srgbClr val="EEF3FB"/>
           </a:solidFill>
           <a:ln w="12700">
             <a:solidFill>
-              <a:srgbClr val="2E4A74"/>
+              <a:srgbClr val="DDE1E7"/>
             </a:solidFill>
           </a:ln>
           <a:effectLst/>
@@ -3597,7 +3597,7 @@
         </p:nvSpPr>
         <p:spPr>
           <a:xfrm>
-            <a:off x="3383280" y="5623560"/>
+            <a:off x="3383280" y="5577840"/>
             <a:ext cx="2331720" cy="457200"/>
           </a:xfrm>
           <a:prstGeom prst="rect">
@@ -3633,7 +3633,7 @@
             <a:r>
               <a:rPr sz="1100" b="0" i="0">
                 <a:solidFill>
-                  <a:srgbClr val="FFFFFF"/>
+                  <a:srgbClr val="14356B"/>
                 </a:solidFill>
                 <a:latin typeface="Yu Gothic UI"/>
                 <a:ea typeface="Yu Gothic UI"/>
@@ -3652,7 +3652,7 @@
         </p:nvSpPr>
         <p:spPr>
           <a:xfrm>
-            <a:off x="5897880" y="5623560"/>
+            <a:off x="5897880" y="5577840"/>
             <a:ext cx="2331720" cy="457200"/>
           </a:xfrm>
           <a:prstGeom prst="roundRect">
@@ -3661,11 +3661,11 @@
             </a:avLst>
           </a:prstGeom>
           <a:solidFill>
-            <a:srgbClr val="142A47"/>
+            <a:srgbClr val="EEF3FB"/>
           </a:solidFill>
           <a:ln w="12700">
             <a:solidFill>
-              <a:srgbClr val="2E4A74"/>
+              <a:srgbClr val="DDE1E7"/>
             </a:solidFill>
           </a:ln>
           <a:effectLst/>
@@ -3700,7 +3700,7 @@
         </p:nvSpPr>
         <p:spPr>
           <a:xfrm>
-            <a:off x="5897880" y="5623560"/>
+            <a:off x="5897880" y="5577840"/>
             <a:ext cx="2331720" cy="457200"/>
           </a:xfrm>
           <a:prstGeom prst="rect">
@@ -3736,7 +3736,7 @@
             <a:r>
               <a:rPr sz="1100" b="0" i="0">
                 <a:solidFill>
-                  <a:srgbClr val="FFFFFF"/>
+                  <a:srgbClr val="14356B"/>
                 </a:solidFill>
                 <a:latin typeface="Yu Gothic UI"/>
                 <a:ea typeface="Yu Gothic UI"/>
@@ -3755,7 +3755,7 @@
         </p:nvSpPr>
         <p:spPr>
           <a:xfrm>
-            <a:off x="8412480" y="5623560"/>
+            <a:off x="8412480" y="5577840"/>
             <a:ext cx="2331720" cy="457200"/>
           </a:xfrm>
           <a:prstGeom prst="roundRect">
@@ -3764,11 +3764,11 @@
             </a:avLst>
           </a:prstGeom>
           <a:solidFill>
-            <a:srgbClr val="142A47"/>
+            <a:srgbClr val="EEF3FB"/>
           </a:solidFill>
           <a:ln w="12700">
             <a:solidFill>
-              <a:srgbClr val="2E4A74"/>
+              <a:srgbClr val="DDE1E7"/>
             </a:solidFill>
           </a:ln>
           <a:effectLst/>
@@ -3803,7 +3803,7 @@
         </p:nvSpPr>
         <p:spPr>
           <a:xfrm>
-            <a:off x="8412480" y="5623560"/>
+            <a:off x="8412480" y="5577840"/>
             <a:ext cx="2331720" cy="457200"/>
           </a:xfrm>
           <a:prstGeom prst="rect">
@@ -3839,7 +3839,7 @@
             <a:r>
               <a:rPr sz="1100" b="0" i="0">
                 <a:solidFill>
-                  <a:srgbClr val="FFFFFF"/>
+                  <a:srgbClr val="14356B"/>
                 </a:solidFill>
                 <a:latin typeface="Yu Gothic UI"/>
                 <a:ea typeface="Yu Gothic UI"/>
@@ -3850,15 +3850,50 @@
           </a:p>
         </p:txBody>
       </p:sp>
-      <p:sp>
-        <p:nvSpPr>
-          <p:cNvPr id="16" name="TextBox 15"/>
+      <p:cxnSp>
+        <p:nvCxnSpPr>
+          <p:cNvPr id="16" name="Connector 15"/>
+          <p:cNvCxnSpPr/>
+          <p:nvPr/>
+        </p:nvCxnSpPr>
+        <p:spPr>
+          <a:xfrm>
+            <a:off x="868680" y="6327648"/>
+            <a:ext cx="10451592" cy="0"/>
+          </a:xfrm>
+          <a:prstGeom prst="bentConnector3">
+            <a:avLst/>
+          </a:prstGeom>
+          <a:ln w="9525">
+            <a:solidFill>
+              <a:srgbClr val="DDE1E7"/>
+            </a:solidFill>
+          </a:ln>
+        </p:spPr>
+        <p:style>
+          <a:lnRef idx="2">
+            <a:schemeClr val="accent1"/>
+          </a:lnRef>
+          <a:fillRef idx="0">
+            <a:schemeClr val="accent1"/>
+          </a:fillRef>
+          <a:effectRef idx="1">
+            <a:schemeClr val="accent1"/>
+          </a:effectRef>
+          <a:fontRef idx="minor">
+            <a:schemeClr val="tx1"/>
+          </a:fontRef>
+        </p:style>
+      </p:cxnSp>
+      <p:sp>
+        <p:nvSpPr>
+          <p:cNvPr id="17" name="TextBox 16"/>
           <p:cNvSpPr txBox="1"/>
           <p:nvPr/>
         </p:nvSpPr>
         <p:spPr>
           <a:xfrm>
-            <a:off x="868680" y="6355080"/>
+            <a:off x="868680" y="6382512"/>
             <a:ext cx="10424160" cy="365760"/>
           </a:xfrm>
           <a:prstGeom prst="rect">
@@ -3883,7 +3918,7 @@
             <a:r>
               <a:rPr sz="950" b="0" i="0">
                 <a:solidFill>
-                  <a:srgbClr val="8FA6C8"/>
+                  <a:srgbClr val="5B6472"/>
                 </a:solidFill>
                 <a:latin typeface="Yu Gothic UI"/>
                 <a:ea typeface="Yu Gothic UI"/>
@@ -3908,7 +3943,7 @@
     <p:bg>
       <p:bgPr>
         <a:solidFill>
-          <a:srgbClr val="F6F7F9"/>
+          <a:srgbClr val="FFFFFF"/>
         </a:solidFill>
         <a:effectLst/>
       </p:bgPr>
@@ -5319,7 +5354,7 @@
     <p:bg>
       <p:bgPr>
         <a:solidFill>
-          <a:srgbClr val="F6F7F9"/>
+          <a:srgbClr val="FFFFFF"/>
         </a:solidFill>
         <a:effectLst/>
       </p:bgPr>
@@ -7116,7 +7151,7 @@
     <p:bg>
       <p:bgPr>
         <a:solidFill>
-          <a:srgbClr val="F6F7F9"/>
+          <a:srgbClr val="FFFFFF"/>
         </a:solidFill>
         <a:effectLst/>
       </p:bgPr>
@@ -8268,7 +8303,7 @@
     <p:bg>
       <p:bgPr>
         <a:solidFill>
-          <a:srgbClr val="F6F7F9"/>
+          <a:srgbClr val="FFFFFF"/>
         </a:solidFill>
         <a:effectLst/>
       </p:bgPr>
@@ -9406,7 +9441,7 @@
     <p:bg>
       <p:bgPr>
         <a:solidFill>
-          <a:srgbClr val="F6F7F9"/>
+          <a:srgbClr val="FFFFFF"/>
         </a:solidFill>
         <a:effectLst/>
       </p:bgPr>
@@ -11531,7 +11566,7 @@
     <p:bg>
       <p:bgPr>
         <a:solidFill>
-          <a:srgbClr val="F6F7F9"/>
+          <a:srgbClr val="FFFFFF"/>
         </a:solidFill>
         <a:effectLst/>
       </p:bgPr>
@@ -12434,7 +12469,7 @@
     <p:bg>
       <p:bgPr>
         <a:solidFill>
-          <a:srgbClr val="F6F7F9"/>
+          <a:srgbClr val="FFFFFF"/>
         </a:solidFill>
         <a:effectLst/>
       </p:bgPr>
@@ -13649,7 +13684,7 @@
     <p:bg>
       <p:bgPr>
         <a:solidFill>
-          <a:srgbClr val="F6F7F9"/>
+          <a:srgbClr val="FFFFFF"/>
         </a:solidFill>
         <a:effectLst/>
       </p:bgPr>
@@ -14770,7 +14805,7 @@
     <p:bg>
       <p:bgPr>
         <a:solidFill>
-          <a:srgbClr val="F6F7F9"/>
+          <a:srgbClr val="FFFFFF"/>
         </a:solidFill>
         <a:effectLst/>
       </p:bgPr>
@@ -16194,7 +16229,7 @@
     <p:bg>
       <p:bgPr>
         <a:solidFill>
-          <a:srgbClr val="F6F7F9"/>
+          <a:srgbClr val="FFFFFF"/>
         </a:solidFill>
         <a:effectLst/>
       </p:bgPr>
@@ -17097,7 +17132,7 @@
     <p:bg>
       <p:bgPr>
         <a:solidFill>
-          <a:srgbClr val="F6F7F9"/>
+          <a:srgbClr val="FFFFFF"/>
         </a:solidFill>
         <a:effectLst/>
       </p:bgPr>
@@ -18335,7 +18370,7 @@
     <p:bg>
       <p:bgPr>
         <a:solidFill>
-          <a:srgbClr val="F6F7F9"/>
+          <a:srgbClr val="FFFFFF"/>
         </a:solidFill>
         <a:effectLst/>
       </p:bgPr>
@@ -19815,7 +19850,7 @@
     <p:bg>
       <p:bgPr>
         <a:solidFill>
-          <a:srgbClr val="F6F7F9"/>
+          <a:srgbClr val="FFFFFF"/>
         </a:solidFill>
         <a:effectLst/>
       </p:bgPr>
@@ -20451,7 +20486,7 @@
     <p:bg>
       <p:bgPr>
         <a:solidFill>
-          <a:srgbClr val="F6F7F9"/>
+          <a:srgbClr val="FFFFFF"/>
         </a:solidFill>
         <a:effectLst/>
       </p:bgPr>
@@ -21270,7 +21305,7 @@
     <p:bg>
       <p:bgPr>
         <a:solidFill>
-          <a:srgbClr val="0B1B33"/>
+          <a:srgbClr val="FFFFFF"/>
         </a:solidFill>
         <a:effectLst/>
       </p:bgPr>
@@ -21291,13 +21326,13 @@
         <p:spPr>
           <a:xfrm>
             <a:off x="0" y="0"/>
-            <a:ext cx="12191695" cy="6858000"/>
+            <a:ext cx="12191695" cy="128016"/>
           </a:xfrm>
           <a:prstGeom prst="rect">
             <a:avLst/>
           </a:prstGeom>
           <a:solidFill>
-            <a:srgbClr val="0B1B33"/>
+            <a:srgbClr val="14356B"/>
           </a:solidFill>
           <a:ln>
             <a:noFill/>
@@ -21328,7 +21363,7 @@
       </p:sp>
       <p:pic>
         <p:nvPicPr>
-          <p:cNvPr id="3" name="Picture 2" descr="logo_icon_light.png"/>
+          <p:cNvPr id="3" name="Picture 2" descr="logo_icon.png"/>
           <p:cNvPicPr>
             <a:picLocks noChangeAspect="1"/>
           </p:cNvPicPr>
@@ -21342,7 +21377,7 @@
         </p:blipFill>
         <p:spPr>
           <a:xfrm>
-            <a:off x="5641848" y="822960"/>
+            <a:off x="5641848" y="868680"/>
             <a:ext cx="1039091" cy="1143000"/>
           </a:xfrm>
           <a:prstGeom prst="rect">
@@ -21358,7 +21393,7 @@
         </p:nvSpPr>
         <p:spPr>
           <a:xfrm>
-            <a:off x="914400" y="2286000"/>
+            <a:off x="914400" y="2331720"/>
             <a:ext cx="10332720" cy="1097280"/>
           </a:xfrm>
           <a:prstGeom prst="rect">
@@ -21386,7 +21421,7 @@
             <a:r>
               <a:rPr sz="3000" b="1" i="0">
                 <a:solidFill>
-                  <a:srgbClr val="FFFFFF"/>
+                  <a:srgbClr val="14356B"/>
                 </a:solidFill>
                 <a:latin typeface="Yu Gothic UI"/>
                 <a:ea typeface="Yu Gothic UI"/>
@@ -21405,7 +21440,7 @@
         </p:nvSpPr>
         <p:spPr>
           <a:xfrm>
-            <a:off x="1371600" y="3429000"/>
+            <a:off x="1371600" y="3474720"/>
             <a:ext cx="9418320" cy="822960"/>
           </a:xfrm>
           <a:prstGeom prst="rect">
@@ -21433,7 +21468,7 @@
             <a:r>
               <a:rPr sz="1300" b="0" i="0">
                 <a:solidFill>
-                  <a:srgbClr val="C8D6EC"/>
+                  <a:srgbClr val="5B6472"/>
                 </a:solidFill>
                 <a:latin typeface="Yu Gothic UI"/>
                 <a:ea typeface="Yu Gothic UI"/>
@@ -21452,7 +21487,7 @@
         </p:nvSpPr>
         <p:spPr>
           <a:xfrm>
-            <a:off x="1051560" y="4434840"/>
+            <a:off x="1051560" y="4480560"/>
             <a:ext cx="2468880" cy="868680"/>
           </a:xfrm>
           <a:prstGeom prst="roundRect">
@@ -21461,11 +21496,11 @@
             </a:avLst>
           </a:prstGeom>
           <a:solidFill>
-            <a:srgbClr val="112440"/>
+            <a:srgbClr val="EEF3FB"/>
           </a:solidFill>
           <a:ln w="12700">
             <a:solidFill>
-              <a:srgbClr val="2A3F63"/>
+              <a:srgbClr val="DDE1E7"/>
             </a:solidFill>
           </a:ln>
           <a:effectLst/>
@@ -21500,7 +21535,7 @@
         </p:nvSpPr>
         <p:spPr>
           <a:xfrm>
-            <a:off x="1051560" y="4526280"/>
+            <a:off x="1051560" y="4572000"/>
             <a:ext cx="2468880" cy="685800"/>
           </a:xfrm>
           <a:prstGeom prst="rect">
@@ -21525,7 +21560,7 @@
             <a:r>
               <a:rPr sz="1200" b="1" i="0">
                 <a:solidFill>
-                  <a:srgbClr val="C5A059"/>
+                  <a:srgbClr val="2A63C7"/>
                 </a:solidFill>
                 <a:latin typeface="Yu Gothic UI"/>
                 <a:ea typeface="Yu Gothic UI"/>
@@ -21549,7 +21584,7 @@
             <a:r>
               <a:rPr sz="900" b="0" i="0">
                 <a:solidFill>
-                  <a:srgbClr val="C8D6EC"/>
+                  <a:srgbClr val="5B6472"/>
                 </a:solidFill>
                 <a:latin typeface="Yu Gothic UI"/>
                 <a:ea typeface="Yu Gothic UI"/>
@@ -21568,7 +21603,7 @@
         </p:nvSpPr>
         <p:spPr>
           <a:xfrm>
-            <a:off x="3739896" y="4434840"/>
+            <a:off x="3739896" y="4480560"/>
             <a:ext cx="2468880" cy="868680"/>
           </a:xfrm>
           <a:prstGeom prst="roundRect">
@@ -21577,11 +21612,11 @@
             </a:avLst>
           </a:prstGeom>
           <a:solidFill>
-            <a:srgbClr val="112440"/>
+            <a:srgbClr val="EEF3FB"/>
           </a:solidFill>
           <a:ln w="12700">
             <a:solidFill>
-              <a:srgbClr val="2A3F63"/>
+              <a:srgbClr val="DDE1E7"/>
             </a:solidFill>
           </a:ln>
           <a:effectLst/>
@@ -21616,7 +21651,7 @@
         </p:nvSpPr>
         <p:spPr>
           <a:xfrm>
-            <a:off x="3739896" y="4526280"/>
+            <a:off x="3739896" y="4572000"/>
             <a:ext cx="2468880" cy="685800"/>
           </a:xfrm>
           <a:prstGeom prst="rect">
@@ -21641,7 +21676,7 @@
             <a:r>
               <a:rPr sz="1200" b="1" i="0">
                 <a:solidFill>
-                  <a:srgbClr val="C5A059"/>
+                  <a:srgbClr val="2A63C7"/>
                 </a:solidFill>
                 <a:latin typeface="Yu Gothic UI"/>
                 <a:ea typeface="Yu Gothic UI"/>
@@ -21665,7 +21700,7 @@
             <a:r>
               <a:rPr sz="900" b="0" i="0">
                 <a:solidFill>
-                  <a:srgbClr val="C8D6EC"/>
+                  <a:srgbClr val="5B6472"/>
                 </a:solidFill>
                 <a:latin typeface="Yu Gothic UI"/>
                 <a:ea typeface="Yu Gothic UI"/>
@@ -21684,7 +21719,7 @@
         </p:nvSpPr>
         <p:spPr>
           <a:xfrm>
-            <a:off x="6428232" y="4434840"/>
+            <a:off x="6428232" y="4480560"/>
             <a:ext cx="2468880" cy="868680"/>
           </a:xfrm>
           <a:prstGeom prst="roundRect">
@@ -21693,11 +21728,11 @@
             </a:avLst>
           </a:prstGeom>
           <a:solidFill>
-            <a:srgbClr val="112440"/>
+            <a:srgbClr val="EEF3FB"/>
           </a:solidFill>
           <a:ln w="12700">
             <a:solidFill>
-              <a:srgbClr val="2A3F63"/>
+              <a:srgbClr val="DDE1E7"/>
             </a:solidFill>
           </a:ln>
           <a:effectLst/>
@@ -21732,7 +21767,7 @@
         </p:nvSpPr>
         <p:spPr>
           <a:xfrm>
-            <a:off x="6428232" y="4526280"/>
+            <a:off x="6428232" y="4572000"/>
             <a:ext cx="2468880" cy="685800"/>
           </a:xfrm>
           <a:prstGeom prst="rect">
@@ -21757,7 +21792,7 @@
             <a:r>
               <a:rPr sz="1200" b="1" i="0">
                 <a:solidFill>
-                  <a:srgbClr val="C5A059"/>
+                  <a:srgbClr val="2A63C7"/>
                 </a:solidFill>
                 <a:latin typeface="Yu Gothic UI"/>
                 <a:ea typeface="Yu Gothic UI"/>
@@ -21781,7 +21816,7 @@
             <a:r>
               <a:rPr sz="900" b="0" i="0">
                 <a:solidFill>
-                  <a:srgbClr val="C8D6EC"/>
+                  <a:srgbClr val="5B6472"/>
                 </a:solidFill>
                 <a:latin typeface="Yu Gothic UI"/>
                 <a:ea typeface="Yu Gothic UI"/>
@@ -21800,7 +21835,7 @@
         </p:nvSpPr>
         <p:spPr>
           <a:xfrm>
-            <a:off x="9116568" y="4434840"/>
+            <a:off x="9116568" y="4480560"/>
             <a:ext cx="2468880" cy="868680"/>
           </a:xfrm>
           <a:prstGeom prst="roundRect">
@@ -21809,11 +21844,11 @@
             </a:avLst>
           </a:prstGeom>
           <a:solidFill>
-            <a:srgbClr val="112440"/>
+            <a:srgbClr val="EEF3FB"/>
           </a:solidFill>
           <a:ln w="12700">
             <a:solidFill>
-              <a:srgbClr val="2A3F63"/>
+              <a:srgbClr val="DDE1E7"/>
             </a:solidFill>
           </a:ln>
           <a:effectLst/>
@@ -21848,7 +21883,7 @@
         </p:nvSpPr>
         <p:spPr>
           <a:xfrm>
-            <a:off x="9116568" y="4526280"/>
+            <a:off x="9116568" y="4572000"/>
             <a:ext cx="2468880" cy="685800"/>
           </a:xfrm>
           <a:prstGeom prst="rect">
@@ -21873,7 +21908,7 @@
             <a:r>
               <a:rPr sz="1200" b="1" i="0">
                 <a:solidFill>
-                  <a:srgbClr val="C5A059"/>
+                  <a:srgbClr val="2A63C7"/>
                 </a:solidFill>
                 <a:latin typeface="Yu Gothic UI"/>
                 <a:ea typeface="Yu Gothic UI"/>
@@ -21897,7 +21932,7 @@
             <a:r>
               <a:rPr sz="900" b="0" i="0">
                 <a:solidFill>
-                  <a:srgbClr val="C8D6EC"/>
+                  <a:srgbClr val="5B6472"/>
                 </a:solidFill>
                 <a:latin typeface="Yu Gothic UI"/>
                 <a:ea typeface="Yu Gothic UI"/>
@@ -21908,15 +21943,50 @@
           </a:p>
         </p:txBody>
       </p:sp>
-      <p:sp>
-        <p:nvSpPr>
-          <p:cNvPr id="14" name="TextBox 13"/>
+      <p:cxnSp>
+        <p:nvCxnSpPr>
+          <p:cNvPr id="14" name="Connector 13"/>
+          <p:cNvCxnSpPr/>
+          <p:nvPr/>
+        </p:nvCxnSpPr>
+        <p:spPr>
+          <a:xfrm>
+            <a:off x="1051560" y="5806440"/>
+            <a:ext cx="10085832" cy="0"/>
+          </a:xfrm>
+          <a:prstGeom prst="bentConnector3">
+            <a:avLst/>
+          </a:prstGeom>
+          <a:ln w="9525">
+            <a:solidFill>
+              <a:srgbClr val="DDE1E7"/>
+            </a:solidFill>
+          </a:ln>
+        </p:spPr>
+        <p:style>
+          <a:lnRef idx="2">
+            <a:schemeClr val="accent1"/>
+          </a:lnRef>
+          <a:fillRef idx="0">
+            <a:schemeClr val="accent1"/>
+          </a:fillRef>
+          <a:effectRef idx="1">
+            <a:schemeClr val="accent1"/>
+          </a:effectRef>
+          <a:fontRef idx="minor">
+            <a:schemeClr val="tx1"/>
+          </a:fontRef>
+        </p:style>
+      </p:cxnSp>
+      <p:sp>
+        <p:nvSpPr>
+          <p:cNvPr id="15" name="TextBox 14"/>
           <p:cNvSpPr txBox="1"/>
           <p:nvPr/>
         </p:nvSpPr>
         <p:spPr>
           <a:xfrm>
-            <a:off x="914400" y="5806440"/>
+            <a:off x="914400" y="5870448"/>
             <a:ext cx="10332720" cy="457200"/>
           </a:xfrm>
           <a:prstGeom prst="rect">
@@ -21941,7 +22011,7 @@
             <a:r>
               <a:rPr sz="1050" b="0" i="0">
                 <a:solidFill>
-                  <a:srgbClr val="9DB4D6"/>
+                  <a:srgbClr val="5B6472"/>
                 </a:solidFill>
                 <a:latin typeface="Yu Gothic UI"/>
                 <a:ea typeface="Yu Gothic UI"/>
@@ -21966,7 +22036,7 @@
     <p:bg>
       <p:bgPr>
         <a:solidFill>
-          <a:srgbClr val="F6F7F9"/>
+          <a:srgbClr val="FFFFFF"/>
         </a:solidFill>
         <a:effectLst/>
       </p:bgPr>
@@ -22900,7 +22970,7 @@
     <p:bg>
       <p:bgPr>
         <a:solidFill>
-          <a:srgbClr val="F6F7F9"/>
+          <a:srgbClr val="FFFFFF"/>
         </a:solidFill>
         <a:effectLst/>
       </p:bgPr>
@@ -23813,7 +23883,7 @@
     <p:bg>
       <p:bgPr>
         <a:solidFill>
-          <a:srgbClr val="0B1B33"/>
+          <a:srgbClr val="FFFFFF"/>
         </a:solidFill>
         <a:effectLst/>
       </p:bgPr>
@@ -23827,58 +23897,14 @@
       <p:grpSpPr/>
       <p:sp>
         <p:nvSpPr>
-          <p:cNvPr id="2" name="Rectangle 1"/>
-          <p:cNvSpPr/>
-          <p:nvPr/>
-        </p:nvSpPr>
-        <p:spPr>
-          <a:xfrm>
-            <a:off x="0" y="0"/>
-            <a:ext cx="12191695" cy="6858000"/>
-          </a:xfrm>
-          <a:prstGeom prst="rect">
-            <a:avLst/>
-          </a:prstGeom>
-          <a:solidFill>
-            <a:srgbClr val="0B1B33"/>
-          </a:solidFill>
-          <a:ln>
-            <a:noFill/>
-          </a:ln>
-          <a:effectLst/>
-        </p:spPr>
-        <p:style>
-          <a:lnRef idx="1">
-            <a:schemeClr val="accent1"/>
-          </a:lnRef>
-          <a:fillRef idx="3">
-            <a:schemeClr val="accent1"/>
-          </a:fillRef>
-          <a:effectRef idx="2">
-            <a:schemeClr val="accent1"/>
-          </a:effectRef>
-          <a:fontRef idx="minor">
-            <a:schemeClr val="lt1"/>
-          </a:fontRef>
-        </p:style>
-        <p:txBody>
-          <a:bodyPr rtlCol="0" anchor="ctr"/>
-          <a:lstStyle/>
-          <a:p>
-            <a:pPr algn="ctr"/>
-          </a:p>
-        </p:txBody>
-      </p:sp>
-      <p:sp>
-        <p:nvSpPr>
-          <p:cNvPr id="3" name="TextBox 2"/>
+          <p:cNvPr id="2" name="TextBox 1"/>
           <p:cNvSpPr txBox="1"/>
           <p:nvPr/>
         </p:nvSpPr>
         <p:spPr>
           <a:xfrm>
-            <a:off x="822960" y="640080"/>
-            <a:ext cx="10515600" cy="365760"/>
+            <a:off x="640080" y="457200"/>
+            <a:ext cx="10881360" cy="365760"/>
           </a:xfrm>
           <a:prstGeom prst="rect">
             <a:avLst/>
@@ -23900,9 +23926,9 @@
               </a:spcAft>
             </a:pPr>
             <a:r>
-              <a:rPr sz="1100" b="1" i="0" spc="250">
-                <a:solidFill>
-                  <a:srgbClr val="C5A059"/>
+              <a:rPr sz="1100" b="1" i="0" spc="220">
+                <a:solidFill>
+                  <a:srgbClr val="2A63C7"/>
                 </a:solidFill>
                 <a:latin typeface="Arial"/>
                 <a:ea typeface="Arial"/>
@@ -23915,62 +23941,14 @@
       </p:sp>
       <p:sp>
         <p:nvSpPr>
-          <p:cNvPr id="4" name="Rounded Rectangle 3"/>
-          <p:cNvSpPr/>
-          <p:nvPr/>
-        </p:nvSpPr>
-        <p:spPr>
-          <a:xfrm>
-            <a:off x="822960" y="1371600"/>
-            <a:ext cx="5120640" cy="4297680"/>
-          </a:xfrm>
-          <a:prstGeom prst="roundRect">
-            <a:avLst>
-              <a:gd name="adj" fmla="val 5000"/>
-            </a:avLst>
-          </a:prstGeom>
-          <a:solidFill>
-            <a:srgbClr val="112440"/>
-          </a:solidFill>
-          <a:ln w="12700">
-            <a:solidFill>
-              <a:srgbClr val="2A3F63"/>
-            </a:solidFill>
-          </a:ln>
-          <a:effectLst/>
-        </p:spPr>
-        <p:style>
-          <a:lnRef idx="1">
-            <a:schemeClr val="accent1"/>
-          </a:lnRef>
-          <a:fillRef idx="3">
-            <a:schemeClr val="accent1"/>
-          </a:fillRef>
-          <a:effectRef idx="2">
-            <a:schemeClr val="accent1"/>
-          </a:effectRef>
-          <a:fontRef idx="minor">
-            <a:schemeClr val="lt1"/>
-          </a:fontRef>
-        </p:style>
-        <p:txBody>
-          <a:bodyPr rtlCol="0" anchor="ctr"/>
-          <a:lstStyle/>
-          <a:p>
-            <a:pPr algn="ctr"/>
-          </a:p>
-        </p:txBody>
-      </p:sp>
-      <p:sp>
-        <p:nvSpPr>
-          <p:cNvPr id="5" name="TextBox 4"/>
+          <p:cNvPr id="3" name="TextBox 2"/>
           <p:cNvSpPr txBox="1"/>
           <p:nvPr/>
         </p:nvSpPr>
         <p:spPr>
           <a:xfrm>
-            <a:off x="1143000" y="1691640"/>
-            <a:ext cx="4572000" cy="3749039"/>
+            <a:off x="640080" y="749808"/>
+            <a:ext cx="10881360" cy="914400"/>
           </a:xfrm>
           <a:prstGeom prst="rect">
             <a:avLst/>
@@ -23984,262 +23962,33 @@
           <a:lstStyle/>
           <a:p>
             <a:pPr algn="l">
-              <a:spcBef>
-                <a:spcPts val="0"/>
-              </a:spcBef>
-              <a:spcAft>
-                <a:spcPts val="1000"/>
-              </a:spcAft>
-            </a:pPr>
-            <a:r>
-              <a:rPr sz="1300" b="1" i="0" spc="200">
-                <a:solidFill>
-                  <a:srgbClr val="C5A059"/>
-                </a:solidFill>
-                <a:latin typeface="Arial"/>
-                <a:ea typeface="Arial"/>
-                <a:cs typeface="Arial"/>
-              </a:rPr>
-              <a:t>MISSION</a:t>
-            </a:r>
-          </a:p>
-          <a:p>
-            <a:pPr algn="l">
               <a:lnSpc>
-                <a:spcPct val="125000"/>
+                <a:spcPct val="105000"/>
               </a:lnSpc>
               <a:spcBef>
                 <a:spcPts val="0"/>
               </a:spcBef>
               <a:spcAft>
-                <a:spcPts val="1600"/>
-              </a:spcAft>
-            </a:pPr>
-            <a:r>
-              <a:rPr sz="1900" b="1" i="0">
-                <a:solidFill>
-                  <a:srgbClr val="FFFFFF"/>
+                <a:spcPts val="400"/>
+              </a:spcAft>
+            </a:pPr>
+            <a:r>
+              <a:rPr sz="2700" b="1" i="0">
+                <a:solidFill>
+                  <a:srgbClr val="14356B"/>
                 </a:solidFill>
                 <a:latin typeface="Yu Gothic UI"/>
                 <a:ea typeface="Yu Gothic UI"/>
                 <a:cs typeface="Yu Gothic UI"/>
               </a:rPr>
-              <a:t>AI時代のコンテンツ利用を、正規アクセス・利用ログ・請求分配へ。</a:t>
-            </a:r>
-          </a:p>
-          <a:p>
-            <a:pPr algn="l">
-              <a:lnSpc>
-                <a:spcPct val="130000"/>
-              </a:lnSpc>
-              <a:spcBef>
-                <a:spcPts val="0"/>
-              </a:spcBef>
-              <a:spcAft>
-                <a:spcPts val="400"/>
-              </a:spcAft>
-            </a:pPr>
-            <a:r>
-              <a:rPr sz="1200" b="0" i="0">
-                <a:solidFill>
-                  <a:srgbClr val="C8D6EC"/>
-                </a:solidFill>
-                <a:latin typeface="Yu Gothic UI"/>
-                <a:ea typeface="Yu Gothic UI"/>
-                <a:cs typeface="Yu Gothic UI"/>
-              </a:rPr>
-              <a:t>AI時代の情報流通を、測定可能で、正当に評価される仕組みに変える。</a:t>
-            </a:r>
-          </a:p>
-        </p:txBody>
-      </p:sp>
-      <p:sp>
-        <p:nvSpPr>
-          <p:cNvPr id="6" name="Rounded Rectangle 5"/>
-          <p:cNvSpPr/>
-          <p:nvPr/>
-        </p:nvSpPr>
-        <p:spPr>
-          <a:xfrm>
-            <a:off x="6263640" y="1371600"/>
-            <a:ext cx="5120640" cy="4297680"/>
-          </a:xfrm>
-          <a:prstGeom prst="roundRect">
-            <a:avLst>
-              <a:gd name="adj" fmla="val 5000"/>
-            </a:avLst>
-          </a:prstGeom>
-          <a:solidFill>
-            <a:srgbClr val="112440"/>
-          </a:solidFill>
-          <a:ln w="12700">
-            <a:solidFill>
-              <a:srgbClr val="2A3F63"/>
-            </a:solidFill>
-          </a:ln>
-          <a:effectLst/>
-        </p:spPr>
-        <p:style>
-          <a:lnRef idx="1">
-            <a:schemeClr val="accent1"/>
-          </a:lnRef>
-          <a:fillRef idx="3">
-            <a:schemeClr val="accent1"/>
-          </a:fillRef>
-          <a:effectRef idx="2">
-            <a:schemeClr val="accent1"/>
-          </a:effectRef>
-          <a:fontRef idx="minor">
-            <a:schemeClr val="lt1"/>
-          </a:fontRef>
-        </p:style>
-        <p:txBody>
-          <a:bodyPr rtlCol="0" anchor="ctr"/>
-          <a:lstStyle/>
-          <a:p>
-            <a:pPr algn="ctr"/>
-          </a:p>
-        </p:txBody>
-      </p:sp>
-      <p:sp>
-        <p:nvSpPr>
-          <p:cNvPr id="7" name="TextBox 6"/>
-          <p:cNvSpPr txBox="1"/>
-          <p:nvPr/>
-        </p:nvSpPr>
-        <p:spPr>
-          <a:xfrm>
-            <a:off x="6583680" y="1691640"/>
-            <a:ext cx="4572000" cy="3749039"/>
-          </a:xfrm>
-          <a:prstGeom prst="rect">
-            <a:avLst/>
-          </a:prstGeom>
-          <a:noFill/>
-        </p:spPr>
-        <p:txBody>
-          <a:bodyPr wrap="square" anchor="t" lIns="0" rIns="0" tIns="0" bIns="0">
-            <a:spAutoFit/>
-          </a:bodyPr>
-          <a:lstStyle/>
-          <a:p>
-            <a:pPr algn="l">
-              <a:spcBef>
-                <a:spcPts val="0"/>
-              </a:spcBef>
-              <a:spcAft>
-                <a:spcPts val="1000"/>
-              </a:spcAft>
-            </a:pPr>
-            <a:r>
-              <a:rPr sz="1300" b="1" i="0" spc="200">
-                <a:solidFill>
-                  <a:srgbClr val="C5A059"/>
-                </a:solidFill>
-                <a:latin typeface="Arial"/>
-                <a:ea typeface="Arial"/>
-                <a:cs typeface="Arial"/>
-              </a:rPr>
-              <a:t>VISION</a:t>
-            </a:r>
-          </a:p>
-          <a:p>
-            <a:pPr algn="l">
-              <a:lnSpc>
-                <a:spcPct val="125000"/>
-              </a:lnSpc>
-              <a:spcBef>
-                <a:spcPts val="0"/>
-              </a:spcBef>
-              <a:spcAft>
-                <a:spcPts val="1600"/>
-              </a:spcAft>
-            </a:pPr>
-            <a:r>
-              <a:rPr sz="1900" b="1" i="0">
-                <a:solidFill>
-                  <a:srgbClr val="FFFFFF"/>
-                </a:solidFill>
-                <a:latin typeface="Yu Gothic UI"/>
-                <a:ea typeface="Yu Gothic UI"/>
-                <a:cs typeface="Yu Gothic UI"/>
-              </a:rPr>
-              <a:t>AIに使われる価値を可視化し、正当に収益化できるインフラをつくる。</a:t>
-            </a:r>
-          </a:p>
-          <a:p>
-            <a:pPr algn="l">
-              <a:lnSpc>
-                <a:spcPct val="130000"/>
-              </a:lnSpc>
-              <a:spcBef>
-                <a:spcPts val="0"/>
-              </a:spcBef>
-              <a:spcAft>
-                <a:spcPts val="400"/>
-              </a:spcAft>
-            </a:pPr>
-            <a:r>
-              <a:rPr sz="1200" b="0" i="0">
-                <a:solidFill>
-                  <a:srgbClr val="C8D6EC"/>
-                </a:solidFill>
-                <a:latin typeface="Yu Gothic UI"/>
-                <a:ea typeface="Yu Gothic UI"/>
-                <a:cs typeface="Yu Gothic UI"/>
-              </a:rPr>
-              <a:t>すべての企業・メディア・専門情報サイトが、AIに使われる価値を定量化できる状態へ。</a:t>
-            </a:r>
-          </a:p>
-        </p:txBody>
-      </p:sp>
-      <p:sp>
-        <p:nvSpPr>
-          <p:cNvPr id="8" name="TextBox 7"/>
-          <p:cNvSpPr txBox="1"/>
-          <p:nvPr/>
-        </p:nvSpPr>
-        <p:spPr>
-          <a:xfrm>
-            <a:off x="822960" y="5897880"/>
-            <a:ext cx="10515600" cy="457200"/>
-          </a:xfrm>
-          <a:prstGeom prst="rect">
-            <a:avLst/>
-          </a:prstGeom>
-          <a:noFill/>
-        </p:spPr>
-        <p:txBody>
-          <a:bodyPr wrap="square" anchor="ctr" lIns="0" rIns="0" tIns="0" bIns="0">
-            <a:spAutoFit/>
-          </a:bodyPr>
-          <a:lstStyle/>
-          <a:p>
-            <a:pPr algn="l">
-              <a:spcBef>
-                <a:spcPts val="0"/>
-              </a:spcBef>
-              <a:spcAft>
-                <a:spcPts val="400"/>
-              </a:spcAft>
-            </a:pPr>
-            <a:r>
-              <a:rPr sz="1100" b="0" i="0">
-                <a:solidFill>
-                  <a:srgbClr val="9DB4D6"/>
-                </a:solidFill>
-                <a:latin typeface="Yu Gothic UI"/>
-                <a:ea typeface="Yu Gothic UI"/>
-                <a:cs typeface="Yu Gothic UI"/>
-              </a:rPr>
-              <a:t>可視化 ／ 制御 ／ 記録 ／ 請求 ／ 信頼 — 誇張せず、技術・法務・SEOリスクを前提に設計します。</a:t>
+              <a:t>私たちの使命とビジョン</a:t>
             </a:r>
           </a:p>
         </p:txBody>
       </p:sp>
       <p:cxnSp>
         <p:nvCxnSpPr>
-          <p:cNvPr id="9" name="Connector 8"/>
+          <p:cNvPr id="4" name="Connector 3"/>
           <p:cNvCxnSpPr/>
           <p:nvPr/>
         </p:nvCxnSpPr>
@@ -24253,7 +24002,7 @@
           </a:prstGeom>
           <a:ln w="9525">
             <a:solidFill>
-              <a:srgbClr val="2A3A55"/>
+              <a:srgbClr val="DDE1E7"/>
             </a:solidFill>
           </a:ln>
         </p:spPr>
@@ -24274,7 +24023,7 @@
       </p:cxnSp>
       <p:pic>
         <p:nvPicPr>
-          <p:cNvPr id="10" name="Picture 9" descr="logo_icon_light.png"/>
+          <p:cNvPr id="5" name="Picture 4" descr="logo_icon.png"/>
           <p:cNvPicPr>
             <a:picLocks noChangeAspect="1"/>
           </p:cNvPicPr>
@@ -24298,7 +24047,7 @@
       </p:pic>
       <p:sp>
         <p:nvSpPr>
-          <p:cNvPr id="11" name="TextBox 10"/>
+          <p:cNvPr id="6" name="TextBox 5"/>
           <p:cNvSpPr txBox="1"/>
           <p:nvPr/>
         </p:nvSpPr>
@@ -24329,7 +24078,7 @@
             <a:r>
               <a:rPr sz="850" b="0" i="0">
                 <a:solidFill>
-                  <a:srgbClr val="9DB4D6"/>
+                  <a:srgbClr val="5B6472"/>
                 </a:solidFill>
                 <a:latin typeface="Yu Gothic UI"/>
                 <a:ea typeface="Yu Gothic UI"/>
@@ -24342,7 +24091,7 @@
       </p:sp>
       <p:sp>
         <p:nvSpPr>
-          <p:cNvPr id="12" name="TextBox 11"/>
+          <p:cNvPr id="7" name="TextBox 6"/>
           <p:cNvSpPr txBox="1"/>
           <p:nvPr/>
         </p:nvSpPr>
@@ -24373,7 +24122,7 @@
             <a:r>
               <a:rPr sz="850" b="0" i="0">
                 <a:solidFill>
-                  <a:srgbClr val="9DB4D6"/>
+                  <a:srgbClr val="5B6472"/>
                 </a:solidFill>
                 <a:latin typeface="Arial"/>
                 <a:ea typeface="Arial"/>
@@ -24386,7 +24135,7 @@
       </p:sp>
       <p:sp>
         <p:nvSpPr>
-          <p:cNvPr id="13" name="TextBox 12"/>
+          <p:cNvPr id="8" name="TextBox 7"/>
           <p:cNvSpPr txBox="1"/>
           <p:nvPr/>
         </p:nvSpPr>
@@ -24417,13 +24166,471 @@
             <a:r>
               <a:rPr sz="750" b="0" i="0" spc="150">
                 <a:solidFill>
-                  <a:srgbClr val="9DB4D6"/>
+                  <a:srgbClr val="5B6472"/>
                 </a:solidFill>
                 <a:latin typeface="Arial"/>
                 <a:ea typeface="Arial"/>
                 <a:cs typeface="Arial"/>
               </a:rPr>
               <a:t>CONFIDENTIAL DRAFT</a:t>
+            </a:r>
+          </a:p>
+        </p:txBody>
+      </p:sp>
+      <p:sp>
+        <p:nvSpPr>
+          <p:cNvPr id="9" name="Rounded Rectangle 8"/>
+          <p:cNvSpPr/>
+          <p:nvPr/>
+        </p:nvSpPr>
+        <p:spPr>
+          <a:xfrm>
+            <a:off x="640080" y="1965960"/>
+            <a:ext cx="5349240" cy="3566160"/>
+          </a:xfrm>
+          <a:prstGeom prst="roundRect">
+            <a:avLst>
+              <a:gd name="adj" fmla="val 5000"/>
+            </a:avLst>
+          </a:prstGeom>
+          <a:solidFill>
+            <a:srgbClr val="EEF3FB"/>
+          </a:solidFill>
+          <a:ln w="12700">
+            <a:solidFill>
+              <a:srgbClr val="D6E2F6"/>
+            </a:solidFill>
+          </a:ln>
+          <a:effectLst/>
+        </p:spPr>
+        <p:style>
+          <a:lnRef idx="1">
+            <a:schemeClr val="accent1"/>
+          </a:lnRef>
+          <a:fillRef idx="3">
+            <a:schemeClr val="accent1"/>
+          </a:fillRef>
+          <a:effectRef idx="2">
+            <a:schemeClr val="accent1"/>
+          </a:effectRef>
+          <a:fontRef idx="minor">
+            <a:schemeClr val="lt1"/>
+          </a:fontRef>
+        </p:style>
+        <p:txBody>
+          <a:bodyPr rtlCol="0" anchor="ctr"/>
+          <a:lstStyle/>
+          <a:p>
+            <a:pPr algn="ctr"/>
+          </a:p>
+        </p:txBody>
+      </p:sp>
+      <p:sp>
+        <p:nvSpPr>
+          <p:cNvPr id="10" name="Rectangle 9"/>
+          <p:cNvSpPr/>
+          <p:nvPr/>
+        </p:nvSpPr>
+        <p:spPr>
+          <a:xfrm>
+            <a:off x="640080" y="1965960"/>
+            <a:ext cx="82296" cy="3566160"/>
+          </a:xfrm>
+          <a:prstGeom prst="rect">
+            <a:avLst/>
+          </a:prstGeom>
+          <a:solidFill>
+            <a:srgbClr val="2A63C7"/>
+          </a:solidFill>
+          <a:ln>
+            <a:noFill/>
+          </a:ln>
+          <a:effectLst/>
+        </p:spPr>
+        <p:style>
+          <a:lnRef idx="1">
+            <a:schemeClr val="accent1"/>
+          </a:lnRef>
+          <a:fillRef idx="3">
+            <a:schemeClr val="accent1"/>
+          </a:fillRef>
+          <a:effectRef idx="2">
+            <a:schemeClr val="accent1"/>
+          </a:effectRef>
+          <a:fontRef idx="minor">
+            <a:schemeClr val="lt1"/>
+          </a:fontRef>
+        </p:style>
+        <p:txBody>
+          <a:bodyPr rtlCol="0" anchor="ctr"/>
+          <a:lstStyle/>
+          <a:p>
+            <a:pPr algn="ctr"/>
+          </a:p>
+        </p:txBody>
+      </p:sp>
+      <p:sp>
+        <p:nvSpPr>
+          <p:cNvPr id="11" name="TextBox 10"/>
+          <p:cNvSpPr txBox="1"/>
+          <p:nvPr/>
+        </p:nvSpPr>
+        <p:spPr>
+          <a:xfrm>
+            <a:off x="1005840" y="2286000"/>
+            <a:ext cx="4754880" cy="3017520"/>
+          </a:xfrm>
+          <a:prstGeom prst="rect">
+            <a:avLst/>
+          </a:prstGeom>
+          <a:noFill/>
+        </p:spPr>
+        <p:txBody>
+          <a:bodyPr wrap="square" anchor="t" lIns="0" rIns="0" tIns="0" bIns="0">
+            <a:spAutoFit/>
+          </a:bodyPr>
+          <a:lstStyle/>
+          <a:p>
+            <a:pPr algn="l">
+              <a:spcBef>
+                <a:spcPts val="0"/>
+              </a:spcBef>
+              <a:spcAft>
+                <a:spcPts val="1000"/>
+              </a:spcAft>
+            </a:pPr>
+            <a:r>
+              <a:rPr sz="1300" b="1" i="0" spc="200">
+                <a:solidFill>
+                  <a:srgbClr val="2A63C7"/>
+                </a:solidFill>
+                <a:latin typeface="Arial"/>
+                <a:ea typeface="Arial"/>
+                <a:cs typeface="Arial"/>
+              </a:rPr>
+              <a:t>MISSION</a:t>
+            </a:r>
+          </a:p>
+          <a:p>
+            <a:pPr algn="l">
+              <a:lnSpc>
+                <a:spcPct val="125000"/>
+              </a:lnSpc>
+              <a:spcBef>
+                <a:spcPts val="0"/>
+              </a:spcBef>
+              <a:spcAft>
+                <a:spcPts val="1600"/>
+              </a:spcAft>
+            </a:pPr>
+            <a:r>
+              <a:rPr sz="1900" b="1" i="0">
+                <a:solidFill>
+                  <a:srgbClr val="14356B"/>
+                </a:solidFill>
+                <a:latin typeface="Yu Gothic UI"/>
+                <a:ea typeface="Yu Gothic UI"/>
+                <a:cs typeface="Yu Gothic UI"/>
+              </a:rPr>
+              <a:t>AI時代のコンテンツ利用を、正規アクセス・利用ログ・請求分配へ。</a:t>
+            </a:r>
+          </a:p>
+          <a:p>
+            <a:pPr algn="l">
+              <a:lnSpc>
+                <a:spcPct val="130000"/>
+              </a:lnSpc>
+              <a:spcBef>
+                <a:spcPts val="0"/>
+              </a:spcBef>
+              <a:spcAft>
+                <a:spcPts val="400"/>
+              </a:spcAft>
+            </a:pPr>
+            <a:r>
+              <a:rPr sz="1200" b="0" i="0">
+                <a:solidFill>
+                  <a:srgbClr val="5B6472"/>
+                </a:solidFill>
+                <a:latin typeface="Yu Gothic UI"/>
+                <a:ea typeface="Yu Gothic UI"/>
+                <a:cs typeface="Yu Gothic UI"/>
+              </a:rPr>
+              <a:t>AI時代の情報流通を、測定可能で、正当に評価される仕組みに変える。</a:t>
+            </a:r>
+          </a:p>
+        </p:txBody>
+      </p:sp>
+      <p:sp>
+        <p:nvSpPr>
+          <p:cNvPr id="12" name="Rounded Rectangle 11"/>
+          <p:cNvSpPr/>
+          <p:nvPr/>
+        </p:nvSpPr>
+        <p:spPr>
+          <a:xfrm>
+            <a:off x="6172200" y="1965960"/>
+            <a:ext cx="5349240" cy="3566160"/>
+          </a:xfrm>
+          <a:prstGeom prst="roundRect">
+            <a:avLst>
+              <a:gd name="adj" fmla="val 5000"/>
+            </a:avLst>
+          </a:prstGeom>
+          <a:solidFill>
+            <a:srgbClr val="FCF7EC"/>
+          </a:solidFill>
+          <a:ln w="12700">
+            <a:solidFill>
+              <a:srgbClr val="ECDDBE"/>
+            </a:solidFill>
+          </a:ln>
+          <a:effectLst/>
+        </p:spPr>
+        <p:style>
+          <a:lnRef idx="1">
+            <a:schemeClr val="accent1"/>
+          </a:lnRef>
+          <a:fillRef idx="3">
+            <a:schemeClr val="accent1"/>
+          </a:fillRef>
+          <a:effectRef idx="2">
+            <a:schemeClr val="accent1"/>
+          </a:effectRef>
+          <a:fontRef idx="minor">
+            <a:schemeClr val="lt1"/>
+          </a:fontRef>
+        </p:style>
+        <p:txBody>
+          <a:bodyPr rtlCol="0" anchor="ctr"/>
+          <a:lstStyle/>
+          <a:p>
+            <a:pPr algn="ctr"/>
+          </a:p>
+        </p:txBody>
+      </p:sp>
+      <p:sp>
+        <p:nvSpPr>
+          <p:cNvPr id="13" name="Rectangle 12"/>
+          <p:cNvSpPr/>
+          <p:nvPr/>
+        </p:nvSpPr>
+        <p:spPr>
+          <a:xfrm>
+            <a:off x="6172200" y="1965960"/>
+            <a:ext cx="82296" cy="3566160"/>
+          </a:xfrm>
+          <a:prstGeom prst="rect">
+            <a:avLst/>
+          </a:prstGeom>
+          <a:solidFill>
+            <a:srgbClr val="C5A059"/>
+          </a:solidFill>
+          <a:ln>
+            <a:noFill/>
+          </a:ln>
+          <a:effectLst/>
+        </p:spPr>
+        <p:style>
+          <a:lnRef idx="1">
+            <a:schemeClr val="accent1"/>
+          </a:lnRef>
+          <a:fillRef idx="3">
+            <a:schemeClr val="accent1"/>
+          </a:fillRef>
+          <a:effectRef idx="2">
+            <a:schemeClr val="accent1"/>
+          </a:effectRef>
+          <a:fontRef idx="minor">
+            <a:schemeClr val="lt1"/>
+          </a:fontRef>
+        </p:style>
+        <p:txBody>
+          <a:bodyPr rtlCol="0" anchor="ctr"/>
+          <a:lstStyle/>
+          <a:p>
+            <a:pPr algn="ctr"/>
+          </a:p>
+        </p:txBody>
+      </p:sp>
+      <p:sp>
+        <p:nvSpPr>
+          <p:cNvPr id="14" name="TextBox 13"/>
+          <p:cNvSpPr txBox="1"/>
+          <p:nvPr/>
+        </p:nvSpPr>
+        <p:spPr>
+          <a:xfrm>
+            <a:off x="6537960" y="2286000"/>
+            <a:ext cx="4754880" cy="3017520"/>
+          </a:xfrm>
+          <a:prstGeom prst="rect">
+            <a:avLst/>
+          </a:prstGeom>
+          <a:noFill/>
+        </p:spPr>
+        <p:txBody>
+          <a:bodyPr wrap="square" anchor="t" lIns="0" rIns="0" tIns="0" bIns="0">
+            <a:spAutoFit/>
+          </a:bodyPr>
+          <a:lstStyle/>
+          <a:p>
+            <a:pPr algn="l">
+              <a:spcBef>
+                <a:spcPts val="0"/>
+              </a:spcBef>
+              <a:spcAft>
+                <a:spcPts val="1000"/>
+              </a:spcAft>
+            </a:pPr>
+            <a:r>
+              <a:rPr sz="1300" b="1" i="0" spc="200">
+                <a:solidFill>
+                  <a:srgbClr val="C5A059"/>
+                </a:solidFill>
+                <a:latin typeface="Arial"/>
+                <a:ea typeface="Arial"/>
+                <a:cs typeface="Arial"/>
+              </a:rPr>
+              <a:t>VISION</a:t>
+            </a:r>
+          </a:p>
+          <a:p>
+            <a:pPr algn="l">
+              <a:lnSpc>
+                <a:spcPct val="125000"/>
+              </a:lnSpc>
+              <a:spcBef>
+                <a:spcPts val="0"/>
+              </a:spcBef>
+              <a:spcAft>
+                <a:spcPts val="1600"/>
+              </a:spcAft>
+            </a:pPr>
+            <a:r>
+              <a:rPr sz="1900" b="1" i="0">
+                <a:solidFill>
+                  <a:srgbClr val="14356B"/>
+                </a:solidFill>
+                <a:latin typeface="Yu Gothic UI"/>
+                <a:ea typeface="Yu Gothic UI"/>
+                <a:cs typeface="Yu Gothic UI"/>
+              </a:rPr>
+              <a:t>AIに使われる価値を可視化し、正当に収益化できるインフラをつくる。</a:t>
+            </a:r>
+          </a:p>
+          <a:p>
+            <a:pPr algn="l">
+              <a:lnSpc>
+                <a:spcPct val="130000"/>
+              </a:lnSpc>
+              <a:spcBef>
+                <a:spcPts val="0"/>
+              </a:spcBef>
+              <a:spcAft>
+                <a:spcPts val="400"/>
+              </a:spcAft>
+            </a:pPr>
+            <a:r>
+              <a:rPr sz="1200" b="0" i="0">
+                <a:solidFill>
+                  <a:srgbClr val="5B6472"/>
+                </a:solidFill>
+                <a:latin typeface="Yu Gothic UI"/>
+                <a:ea typeface="Yu Gothic UI"/>
+                <a:cs typeface="Yu Gothic UI"/>
+              </a:rPr>
+              <a:t>すべての企業・メディア・専門情報サイトが、AIに使われる価値を定量化できる状態へ。</a:t>
+            </a:r>
+          </a:p>
+        </p:txBody>
+      </p:sp>
+      <p:sp>
+        <p:nvSpPr>
+          <p:cNvPr id="15" name="Rounded Rectangle 14"/>
+          <p:cNvSpPr/>
+          <p:nvPr/>
+        </p:nvSpPr>
+        <p:spPr>
+          <a:xfrm>
+            <a:off x="640080" y="5715000"/>
+            <a:ext cx="10881360" cy="548640"/>
+          </a:xfrm>
+          <a:prstGeom prst="roundRect">
+            <a:avLst>
+              <a:gd name="adj" fmla="val 12000"/>
+            </a:avLst>
+          </a:prstGeom>
+          <a:solidFill>
+            <a:srgbClr val="EEF3FB"/>
+          </a:solidFill>
+          <a:ln>
+            <a:noFill/>
+          </a:ln>
+          <a:effectLst/>
+        </p:spPr>
+        <p:style>
+          <a:lnRef idx="1">
+            <a:schemeClr val="accent1"/>
+          </a:lnRef>
+          <a:fillRef idx="3">
+            <a:schemeClr val="accent1"/>
+          </a:fillRef>
+          <a:effectRef idx="2">
+            <a:schemeClr val="accent1"/>
+          </a:effectRef>
+          <a:fontRef idx="minor">
+            <a:schemeClr val="lt1"/>
+          </a:fontRef>
+        </p:style>
+        <p:txBody>
+          <a:bodyPr rtlCol="0" anchor="ctr"/>
+          <a:lstStyle/>
+          <a:p>
+            <a:pPr algn="ctr"/>
+          </a:p>
+        </p:txBody>
+      </p:sp>
+      <p:sp>
+        <p:nvSpPr>
+          <p:cNvPr id="16" name="TextBox 15"/>
+          <p:cNvSpPr txBox="1"/>
+          <p:nvPr/>
+        </p:nvSpPr>
+        <p:spPr>
+          <a:xfrm>
+            <a:off x="914400" y="5715000"/>
+            <a:ext cx="10424160" cy="548640"/>
+          </a:xfrm>
+          <a:prstGeom prst="rect">
+            <a:avLst/>
+          </a:prstGeom>
+          <a:noFill/>
+        </p:spPr>
+        <p:txBody>
+          <a:bodyPr wrap="square" anchor="ctr" lIns="0" rIns="0" tIns="0" bIns="0">
+            <a:spAutoFit/>
+          </a:bodyPr>
+          <a:lstStyle/>
+          <a:p>
+            <a:pPr algn="l">
+              <a:spcBef>
+                <a:spcPts val="0"/>
+              </a:spcBef>
+              <a:spcAft>
+                <a:spcPts val="400"/>
+              </a:spcAft>
+            </a:pPr>
+            <a:r>
+              <a:rPr sz="1100" b="0" i="0">
+                <a:solidFill>
+                  <a:srgbClr val="1A1F26"/>
+                </a:solidFill>
+                <a:latin typeface="Yu Gothic UI"/>
+                <a:ea typeface="Yu Gothic UI"/>
+                <a:cs typeface="Yu Gothic UI"/>
+              </a:rPr>
+              <a:t>可視化 ／ 制御 ／ 記録 ／ 請求 ／ 信頼 — 誇張せず、技術・法務・SEOリスクを前提に設計します。</a:t>
             </a:r>
           </a:p>
         </p:txBody>
@@ -24442,7 +24649,7 @@
     <p:bg>
       <p:bgPr>
         <a:solidFill>
-          <a:srgbClr val="F6F7F9"/>
+          <a:srgbClr val="FFFFFF"/>
         </a:solidFill>
         <a:effectLst/>
       </p:bgPr>
@@ -26313,7 +26520,7 @@
     <p:bg>
       <p:bgPr>
         <a:solidFill>
-          <a:srgbClr val="F6F7F9"/>
+          <a:srgbClr val="FFFFFF"/>
         </a:solidFill>
         <a:effectLst/>
       </p:bgPr>
@@ -27153,7 +27360,7 @@
     <p:bg>
       <p:bgPr>
         <a:solidFill>
-          <a:srgbClr val="F6F7F9"/>
+          <a:srgbClr val="FFFFFF"/>
         </a:solidFill>
         <a:effectLst/>
       </p:bgPr>
@@ -28160,7 +28367,7 @@
     <p:bg>
       <p:bgPr>
         <a:solidFill>
-          <a:srgbClr val="F6F7F9"/>
+          <a:srgbClr val="FFFFFF"/>
         </a:solidFill>
         <a:effectLst/>
       </p:bgPr>
